--- a/media/resources/files/EkiOrunduuOnduktar_KOBOYTUU_BOLUU_XO_nXzUfOf.pptx
+++ b/media/resources/files/EkiOrunduuOnduktar_KOBOYTUU_BOLUU_XO_nXzUfOf.pptx
@@ -8507,7 +8507,7 @@
                 <a:ea typeface="+mn-ea"/>
                 <a:cs typeface="+mn-cs"/>
               </a:rPr>
-              <a:t>Турдуу пикирлер учун ыраазычылык билдиребиз.</a:t>
+              <a:t>Түрдүү пикирлер үчүн ыраазычылык билдиребиз.</a:t>
             </a:r>
           </a:p>
           <a:p>

--- a/media/resources/files/EkiOrunduuOnduktar_KOBOYTUU_BOLUU_XO_nXzUfOf.pptx
+++ b/media/resources/files/EkiOrunduuOnduktar_KOBOYTUU_BOLUU_XO_nXzUfOf.pptx
@@ -3949,7 +3949,7 @@
                 <a:ea typeface="+mn-ea"/>
                 <a:cs typeface="Arial" panose="020B0604020202020204" pitchFamily="34" charset="0"/>
               </a:rPr>
-              <a:t>Мугалим үчүн жооп баракчасы жана таратма материалдар камтылган.</a:t>
+              <a:t>Мугалим үчүн жооп барагы жана таратма материалдар бар.</a:t>
             </a:r>
           </a:p>
           <a:p>
@@ -4018,7 +4018,7 @@
                 <a:ea typeface="+mn-ea"/>
                 <a:cs typeface="Arial" panose="020B0604020202020204" pitchFamily="34" charset="0"/>
               </a:rPr>
-              <a:t>Кайсы команда туура жооп бергенине жараша '</a:t>
+              <a:t>Туура жооп берген командага жараша «</a:t>
             </a:r>
             <a:r>
               <a:rPr kumimoji="0" lang="en-GB" sz="2000" b="0" i="0" u="sng" strike="noStrike" kern="1200" cap="none" spc="0" normalizeH="0" baseline="0" noProof="0" dirty="0">
@@ -4035,7 +4035,7 @@
                 <a:ea typeface="+mn-ea"/>
                 <a:cs typeface="Arial" panose="020B0604020202020204" pitchFamily="34" charset="0"/>
               </a:rPr>
-              <a:t>X' </a:t>
+              <a:t>X» </a:t>
             </a:r>
             <a:r>
               <a:rPr kumimoji="0" lang="ru-RU" sz="2000" b="0" i="0" u="sng" strike="noStrike" kern="1200" cap="none" spc="0" normalizeH="0" baseline="0" noProof="0" dirty="0">
@@ -4052,7 +4052,7 @@
                 <a:ea typeface="+mn-ea"/>
                 <a:cs typeface="Arial" panose="020B0604020202020204" pitchFamily="34" charset="0"/>
               </a:rPr>
-              <a:t>же '</a:t>
+              <a:t>же «</a:t>
             </a:r>
             <a:r>
               <a:rPr kumimoji="0" lang="en-GB" sz="2000" b="0" i="0" u="sng" strike="noStrike" kern="1200" cap="none" spc="0" normalizeH="0" baseline="0" noProof="0" dirty="0">
@@ -4069,7 +4069,7 @@
                 <a:ea typeface="+mn-ea"/>
                 <a:cs typeface="Arial" panose="020B0604020202020204" pitchFamily="34" charset="0"/>
               </a:rPr>
-              <a:t>O' </a:t>
+              <a:t>O» </a:t>
             </a:r>
             <a:r>
               <a:rPr kumimoji="0" lang="ru-RU" sz="2000" b="0" i="0" u="sng" strike="noStrike" kern="1200" cap="none" spc="0" normalizeH="0" baseline="0" noProof="0" dirty="0">
@@ -4086,7 +4086,7 @@
                 <a:ea typeface="+mn-ea"/>
                 <a:cs typeface="Arial" panose="020B0604020202020204" pitchFamily="34" charset="0"/>
               </a:rPr>
-              <a:t>баскычын басыңыз/тийип коюңуз</a:t>
+              <a:t>баскычын басыңыз</a:t>
             </a:r>
             <a:r>
               <a:rPr kumimoji="0" lang="en-GB" sz="2000" b="0" i="0" u="none" strike="noStrike" kern="1200" cap="none" spc="0" normalizeH="0" baseline="0" noProof="0" dirty="0">
@@ -4659,7 +4659,7 @@
             <a:pPr algn="ctr"/>
             <a:r>
               <a:rPr lang="en-GB" sz="4400" dirty="0"/>
-              <a:t>14 ÷ 0.7</a:t>
+              <a:t>14 ÷ 0,7</a:t>
             </a:r>
           </a:p>
         </p:txBody>
@@ -4700,7 +4700,7 @@
             <a:pPr algn="ctr"/>
             <a:r>
               <a:rPr lang="en-GB" sz="4400" dirty="0"/>
-              <a:t>4 ÷ 0.05</a:t>
+              <a:t>4 ÷ 0,05</a:t>
             </a:r>
           </a:p>
         </p:txBody>
@@ -4741,7 +4741,7 @@
             <a:pPr algn="ctr"/>
             <a:r>
               <a:rPr lang="en-GB" sz="4400" dirty="0"/>
-              <a:t>51.8 ÷ 1.4</a:t>
+              <a:t>51,8 ÷ 1,4</a:t>
             </a:r>
           </a:p>
         </p:txBody>
@@ -4782,7 +4782,7 @@
             <a:pPr algn="ctr"/>
             <a:r>
               <a:rPr lang="en-GB" sz="4400" dirty="0"/>
-              <a:t>0.9 ÷ 0.18</a:t>
+              <a:t>0,9 ÷ 0,18</a:t>
             </a:r>
           </a:p>
         </p:txBody>
@@ -4823,7 +4823,7 @@
             <a:pPr algn="ctr"/>
             <a:r>
               <a:rPr lang="en-GB" sz="4400" dirty="0"/>
-              <a:t>5.44 ÷ 0.32</a:t>
+              <a:t>5,44 ÷ 0,32</a:t>
             </a:r>
           </a:p>
         </p:txBody>
@@ -4864,7 +4864,7 @@
             <a:pPr algn="ctr"/>
             <a:r>
               <a:rPr lang="en-GB" sz="4400" dirty="0"/>
-              <a:t>0.27 × 0.7</a:t>
+              <a:t>0,27 × 0,7</a:t>
             </a:r>
           </a:p>
         </p:txBody>
@@ -4905,7 +4905,7 @@
             <a:pPr algn="ctr"/>
             <a:r>
               <a:rPr lang="en-GB" sz="4400" dirty="0"/>
-              <a:t>1.3 × 1.6</a:t>
+              <a:t>1,3 × 1,6</a:t>
             </a:r>
           </a:p>
         </p:txBody>
@@ -4946,7 +4946,7 @@
             <a:pPr algn="ctr"/>
             <a:r>
               <a:rPr lang="en-GB" sz="4400" dirty="0"/>
-              <a:t>0.14 × 0.28</a:t>
+              <a:t>0,14 × 0,28</a:t>
             </a:r>
           </a:p>
         </p:txBody>
@@ -4987,7 +4987,7 @@
             <a:pPr algn="ctr"/>
             <a:r>
               <a:rPr lang="en-GB" sz="4400" dirty="0"/>
-              <a:t>2.4 × 0.6</a:t>
+              <a:t>2,4 × 0,6</a:t>
             </a:r>
           </a:p>
         </p:txBody>
